--- a/instructor/modules/Module03-Routing.pptx
+++ b/instructor/modules/Module03-Routing.pptx
@@ -15015,7 +15015,7 @@
                 <a:ea typeface="Arial" pitchFamily="34" charset="-122"/>
                 <a:cs typeface="Arial" pitchFamily="34" charset="-120"/>
               </a:rPr>
-              <a:t>105 minutes  ·  Hands-on  ·  Two solution branches</a:t>
+              <a:t>105 minutes  ·  Hands-on  ·  Two reference solutions (RR v7 + Next.js)</a:t>
             </a:r>
             <a:endParaRPr lang="en-US" sz="1300" dirty="0"/>
           </a:p>
